--- a/assets/pptx/catalog-41.pptx
+++ b/assets/pptx/catalog-41.pptx
@@ -3313,7 +3313,7 @@
                 <a:ea typeface="Ebrima"/>
                 <a:cs typeface="Ebrima"/>
               </a:rPr>
-              <a:t>እሱ ሰው ከበረ አሄሄ ጌታን ያከበረ (2X)</a:t>
+              <a:t>እሱ ሰው ከበረ አሄሄ ጌታን ያከበረ 2X</a:t>
             </a:r>
           </a:p>
           <a:p>
@@ -3403,7 +3403,7 @@
                 <a:ea typeface="Ebrima"/>
                 <a:cs typeface="Ebrima"/>
               </a:rPr>
-              <a:t>ለህዝቦች ሁሉ መድኃኒት (2X)</a:t>
+              <a:t>ለህዝቦች ሁሉ መድኃኒት 2X</a:t>
             </a:r>
           </a:p>
           <a:p>
@@ -3421,7 +3421,7 @@
                 <a:ea typeface="Ebrima"/>
                 <a:cs typeface="Ebrima"/>
               </a:rPr>
-              <a:t>የሆነውን እሱን ስላየሁት (2X)</a:t>
+              <a:t>የሆነውን እሱን ስላየሁት 2X</a:t>
             </a:r>
           </a:p>
           <a:p>
@@ -3439,7 +3439,7 @@
                 <a:ea typeface="Ebrima"/>
                 <a:cs typeface="Ebrima"/>
               </a:rPr>
-              <a:t>መኖር አልሻም ውሰደኝ በቃ (2X)</a:t>
+              <a:t>መኖር አልሻም ውሰደኝ በቃ 2X</a:t>
             </a:r>
           </a:p>
           <a:p>
@@ -3475,7 +3475,7 @@
                 <a:ea typeface="Ebrima"/>
                 <a:cs typeface="Ebrima"/>
               </a:rPr>
-              <a:t>ለኔ ስኬት (3X) ጌታን ማየት</a:t>
+              <a:t>ለኔ ስኬት 3X ጌታን ማየት</a:t>
             </a:r>
           </a:p>
           <a:p>
@@ -3493,7 +3493,7 @@
                 <a:ea typeface="Ebrima"/>
                 <a:cs typeface="Ebrima"/>
               </a:rPr>
-              <a:t>ለኔ ከፍታ (3X) ፊትህ ነው ጌታ</a:t>
+              <a:t>ለኔ ከፍታ 3X ፊትህ ነው ጌታ</a:t>
             </a:r>
           </a:p>
           <a:p>
@@ -3799,7 +3799,7 @@
                 <a:ea typeface="Ebrima"/>
                 <a:cs typeface="Ebrima"/>
               </a:rPr>
-              <a:t>ለጥቂቶች ማዳን ብትዘገይ (2X)</a:t>
+              <a:t>ለጥቂቶች ማዳን ብትዘገይ 2X</a:t>
             </a:r>
           </a:p>
           <a:p>
@@ -3817,7 +3817,7 @@
                 <a:ea typeface="Ebrima"/>
                 <a:cs typeface="Ebrima"/>
               </a:rPr>
-              <a:t>ጨመረብኝ ፍቅርህ በየለቱ (2X)</a:t>
+              <a:t>ጨመረብኝ ፍቅርህ በየለቱ 2X</a:t>
             </a:r>
           </a:p>
           <a:p>
@@ -3835,7 +3835,7 @@
                 <a:ea typeface="Ebrima"/>
                 <a:cs typeface="Ebrima"/>
               </a:rPr>
-              <a:t>ተናፍቀኃል ኢየሱስ የናዝሬቱ (2X)</a:t>
+              <a:t>ተናፍቀኃል ኢየሱስ የናዝሬቱ 2X</a:t>
             </a:r>
           </a:p>
           <a:p>
